--- a/AI-Driven-Loan-Underwriting-Presentation.pptx
+++ b/AI-Driven-Loan-Underwriting-Presentation.pptx
@@ -5370,7 +5370,7 @@
         <p:spPr>
           <a:xfrm>
             <a:off x="2240280" y="1691640"/>
-            <a:ext cx="9281160" cy="4480560"/>
+            <a:ext cx="9281160" cy="3017520"/>
           </a:xfrm>
           <a:prstGeom prst="rect">
             <a:avLst/>
@@ -5469,7 +5469,107 @@
       </p:sp>
       <p:sp>
         <p:nvSpPr>
-          <p:cNvPr id="7" name="Text 4"/>
+          <p:cNvPr id="7" name="Shape 4"/>
+          <p:cNvSpPr/>
+          <p:nvPr/>
+        </p:nvSpPr>
+        <p:spPr>
+          <a:xfrm>
+            <a:off x="640080" y="4892040"/>
+            <a:ext cx="10908792" cy="1143000"/>
+          </a:xfrm>
+          <a:prstGeom prst="roundRect">
+            <a:avLst>
+              <a:gd name="adj" fmla="val 8000"/>
+            </a:avLst>
+          </a:prstGeom>
+          <a:solidFill>
+            <a:srgbClr val="F5F8FF"/>
+          </a:solidFill>
+          <a:ln/>
+        </p:spPr>
+      </p:sp>
+      <p:sp>
+        <p:nvSpPr>
+          <p:cNvPr id="8" name="Text 5"/>
+          <p:cNvSpPr txBox="1"/>
+          <p:nvPr/>
+        </p:nvSpPr>
+        <p:spPr>
+          <a:xfrm>
+            <a:off x="914400" y="5029200"/>
+            <a:ext cx="10332720" cy="274320"/>
+          </a:xfrm>
+          <a:prstGeom prst="rect">
+            <a:avLst/>
+          </a:prstGeom>
+          <a:noFill/>
+          <a:ln/>
+        </p:spPr>
+        <p:txBody>
+          <a:bodyPr wrap="square" lIns="0" tIns="0" rIns="0" bIns="0" rtlCol="0" anchor="ctr"/>
+          <a:lstStyle/>
+          <a:p>
+            <a:pPr indent="0" marL="0">
+              <a:buNone/>
+            </a:pPr>
+            <a:r>
+              <a:rPr lang="en-US" sz="1100" b="1" spc="150" kern="0" dirty="0">
+                <a:solidFill>
+                  <a:srgbClr val="C9A227"/>
+                </a:solidFill>
+                <a:latin typeface="Calibri" pitchFamily="34" charset="0"/>
+                <a:ea typeface="Calibri" pitchFamily="34" charset="-122"/>
+                <a:cs typeface="Calibri" pitchFamily="34" charset="-120"/>
+              </a:rPr>
+              <a:t>WHY IT MATTERS</a:t>
+            </a:r>
+            <a:endParaRPr lang="en-US" sz="1100" dirty="0"/>
+          </a:p>
+        </p:txBody>
+      </p:sp>
+      <p:sp>
+        <p:nvSpPr>
+          <p:cNvPr id="9" name="Text 6"/>
+          <p:cNvSpPr txBox="1"/>
+          <p:nvPr/>
+        </p:nvSpPr>
+        <p:spPr>
+          <a:xfrm>
+            <a:off x="914400" y="5321808"/>
+            <a:ext cx="10332720" cy="640080"/>
+          </a:xfrm>
+          <a:prstGeom prst="rect">
+            <a:avLst/>
+          </a:prstGeom>
+          <a:noFill/>
+          <a:ln/>
+        </p:spPr>
+        <p:txBody>
+          <a:bodyPr wrap="square" lIns="0" tIns="0" rIns="0" bIns="0" rtlCol="0" anchor="t"/>
+          <a:lstStyle/>
+          <a:p>
+            <a:pPr indent="0" marL="0">
+              <a:buNone/>
+            </a:pPr>
+            <a:r>
+              <a:rPr lang="en-US" sz="1350" i="1" dirty="0">
+                <a:solidFill>
+                  <a:srgbClr val="1E2761"/>
+                </a:solidFill>
+                <a:latin typeface="Calibri" pitchFamily="34" charset="0"/>
+                <a:ea typeface="Calibri" pitchFamily="34" charset="-122"/>
+                <a:cs typeface="Calibri" pitchFamily="34" charset="-120"/>
+              </a:rPr>
+              <a:t>Every approval is traceable to a specific officer and evidence hash - essential for a lending decision that may later be audited or disputed.</a:t>
+            </a:r>
+            <a:endParaRPr lang="en-US" sz="1350" dirty="0"/>
+          </a:p>
+        </p:txBody>
+      </p:sp>
+      <p:sp>
+        <p:nvSpPr>
+          <p:cNvPr id="10" name="Text 7"/>
           <p:cNvSpPr txBox="1"/>
           <p:nvPr/>
         </p:nvSpPr>
@@ -5508,7 +5608,7 @@
       </p:sp>
       <p:sp>
         <p:nvSpPr>
-          <p:cNvPr id="8" name="Text 5"/>
+          <p:cNvPr id="11" name="Text 8"/>
           <p:cNvSpPr txBox="1"/>
           <p:nvPr/>
         </p:nvSpPr>
@@ -8149,6 +8249,27 @@
             </a:r>
             <a:endParaRPr lang="en-US" sz="1300" dirty="0"/>
           </a:p>
+          <a:p>
+            <a:pPr marL="228600" indent="-228600">
+              <a:spcAft>
+                <a:spcPts val="1000"/>
+              </a:spcAft>
+              <a:buSzPct val="100000"/>
+              <a:buChar char="▪"/>
+            </a:pPr>
+            <a:r>
+              <a:rPr lang="en-US" sz="1300" dirty="0">
+                <a:solidFill>
+                  <a:srgbClr val="1B1B2F"/>
+                </a:solidFill>
+                <a:latin typeface="Calibri" pitchFamily="34" charset="0"/>
+                <a:ea typeface="Calibri" pitchFamily="34" charset="-122"/>
+                <a:cs typeface="Calibri" pitchFamily="34" charset="-120"/>
+              </a:rPr>
+              <a:t>Trained once offline, applied consistently to every applicant</a:t>
+            </a:r>
+            <a:endParaRPr lang="en-US" sz="1300" dirty="0"/>
+          </a:p>
         </p:txBody>
       </p:sp>
       <p:sp>
@@ -8659,7 +8780,69 @@
       </p:sp>
       <p:sp>
         <p:nvSpPr>
-          <p:cNvPr id="10" name="Text 6"/>
+          <p:cNvPr id="10" name="Shape 6"/>
+          <p:cNvSpPr/>
+          <p:nvPr/>
+        </p:nvSpPr>
+        <p:spPr>
+          <a:xfrm>
+            <a:off x="548640" y="5760720"/>
+            <a:ext cx="11091672" cy="0"/>
+          </a:xfrm>
+          <a:prstGeom prst="line">
+            <a:avLst/>
+          </a:prstGeom>
+          <a:noFill/>
+          <a:ln w="12700">
+            <a:solidFill>
+              <a:srgbClr val="DCE3F5"/>
+            </a:solidFill>
+            <a:prstDash val="solid"/>
+          </a:ln>
+        </p:spPr>
+      </p:sp>
+      <p:sp>
+        <p:nvSpPr>
+          <p:cNvPr id="11" name="Text 7"/>
+          <p:cNvSpPr txBox="1"/>
+          <p:nvPr/>
+        </p:nvSpPr>
+        <p:spPr>
+          <a:xfrm>
+            <a:off x="548640" y="5897880"/>
+            <a:ext cx="11091672" cy="457200"/>
+          </a:xfrm>
+          <a:prstGeom prst="rect">
+            <a:avLst/>
+          </a:prstGeom>
+          <a:noFill/>
+          <a:ln/>
+        </p:spPr>
+        <p:txBody>
+          <a:bodyPr wrap="square" lIns="0" tIns="0" rIns="0" bIns="0" rtlCol="0" anchor="ctr"/>
+          <a:lstStyle/>
+          <a:p>
+            <a:pPr algn="ctr" indent="0" marL="0">
+              <a:buNone/>
+            </a:pPr>
+            <a:r>
+              <a:rPr lang="en-US" sz="1250" i="1" dirty="0">
+                <a:solidFill>
+                  <a:srgbClr val="5B6B8C"/>
+                </a:solidFill>
+                <a:latin typeface="Calibri" pitchFamily="34" charset="0"/>
+                <a:ea typeface="Calibri" pitchFamily="34" charset="-122"/>
+                <a:cs typeface="Calibri" pitchFamily="34" charset="-120"/>
+              </a:rPr>
+              <a:t>Each reference above maps directly onto a specific module of this system - not general background reading.</a:t>
+            </a:r>
+            <a:endParaRPr lang="en-US" sz="1250" dirty="0"/>
+          </a:p>
+        </p:txBody>
+      </p:sp>
+      <p:sp>
+        <p:nvSpPr>
+          <p:cNvPr id="12" name="Text 8"/>
           <p:cNvSpPr txBox="1"/>
           <p:nvPr/>
         </p:nvSpPr>
@@ -8698,7 +8881,7 @@
       </p:sp>
       <p:sp>
         <p:nvSpPr>
-          <p:cNvPr id="11" name="Text 7"/>
+          <p:cNvPr id="13" name="Text 9"/>
           <p:cNvSpPr txBox="1"/>
           <p:nvPr/>
         </p:nvSpPr>
@@ -9798,7 +9981,7 @@
         <p:spPr>
           <a:xfrm>
             <a:off x="2240280" y="1691640"/>
-            <a:ext cx="9281160" cy="4480560"/>
+            <a:ext cx="9281160" cy="3017520"/>
           </a:xfrm>
           <a:prstGeom prst="rect">
             <a:avLst/>
@@ -9918,7 +10101,107 @@
       </p:sp>
       <p:sp>
         <p:nvSpPr>
-          <p:cNvPr id="7" name="Text 4"/>
+          <p:cNvPr id="7" name="Shape 4"/>
+          <p:cNvSpPr/>
+          <p:nvPr/>
+        </p:nvSpPr>
+        <p:spPr>
+          <a:xfrm>
+            <a:off x="640080" y="4892040"/>
+            <a:ext cx="10908792" cy="1143000"/>
+          </a:xfrm>
+          <a:prstGeom prst="roundRect">
+            <a:avLst>
+              <a:gd name="adj" fmla="val 8000"/>
+            </a:avLst>
+          </a:prstGeom>
+          <a:solidFill>
+            <a:srgbClr val="F5F8FF"/>
+          </a:solidFill>
+          <a:ln/>
+        </p:spPr>
+      </p:sp>
+      <p:sp>
+        <p:nvSpPr>
+          <p:cNvPr id="8" name="Text 5"/>
+          <p:cNvSpPr txBox="1"/>
+          <p:nvPr/>
+        </p:nvSpPr>
+        <p:spPr>
+          <a:xfrm>
+            <a:off x="914400" y="5029200"/>
+            <a:ext cx="10332720" cy="274320"/>
+          </a:xfrm>
+          <a:prstGeom prst="rect">
+            <a:avLst/>
+          </a:prstGeom>
+          <a:noFill/>
+          <a:ln/>
+        </p:spPr>
+        <p:txBody>
+          <a:bodyPr wrap="square" lIns="0" tIns="0" rIns="0" bIns="0" rtlCol="0" anchor="ctr"/>
+          <a:lstStyle/>
+          <a:p>
+            <a:pPr indent="0" marL="0">
+              <a:buNone/>
+            </a:pPr>
+            <a:r>
+              <a:rPr lang="en-US" sz="1100" b="1" spc="150" kern="0" dirty="0">
+                <a:solidFill>
+                  <a:srgbClr val="C9A227"/>
+                </a:solidFill>
+                <a:latin typeface="Calibri" pitchFamily="34" charset="0"/>
+                <a:ea typeface="Calibri" pitchFamily="34" charset="-122"/>
+                <a:cs typeface="Calibri" pitchFamily="34" charset="-120"/>
+              </a:rPr>
+              <a:t>WHY IT MATTERS</a:t>
+            </a:r>
+            <a:endParaRPr lang="en-US" sz="1100" dirty="0"/>
+          </a:p>
+        </p:txBody>
+      </p:sp>
+      <p:sp>
+        <p:nvSpPr>
+          <p:cNvPr id="9" name="Text 6"/>
+          <p:cNvSpPr txBox="1"/>
+          <p:nvPr/>
+        </p:nvSpPr>
+        <p:spPr>
+          <a:xfrm>
+            <a:off x="914400" y="5321808"/>
+            <a:ext cx="10332720" cy="640080"/>
+          </a:xfrm>
+          <a:prstGeom prst="rect">
+            <a:avLst/>
+          </a:prstGeom>
+          <a:noFill/>
+          <a:ln/>
+        </p:spPr>
+        <p:txBody>
+          <a:bodyPr wrap="square" lIns="0" tIns="0" rIns="0" bIns="0" rtlCol="0" anchor="t"/>
+          <a:lstStyle/>
+          <a:p>
+            <a:pPr indent="0" marL="0">
+              <a:buNone/>
+            </a:pPr>
+            <a:r>
+              <a:rPr lang="en-US" sz="1350" i="1" dirty="0">
+                <a:solidFill>
+                  <a:srgbClr val="1E2761"/>
+                </a:solidFill>
+                <a:latin typeface="Calibri" pitchFamily="34" charset="0"/>
+                <a:ea typeface="Calibri" pitchFamily="34" charset="-122"/>
+                <a:cs typeface="Calibri" pitchFamily="34" charset="-120"/>
+              </a:rPr>
+              <a:t>Fraudsters often disguise a malicious file behind a fake .pdf extension - checking the actual byte signature closes that loophole before a single line of the document is parsed.</a:t>
+            </a:r>
+            <a:endParaRPr lang="en-US" sz="1350" dirty="0"/>
+          </a:p>
+        </p:txBody>
+      </p:sp>
+      <p:sp>
+        <p:nvSpPr>
+          <p:cNvPr id="10" name="Text 7"/>
           <p:cNvSpPr txBox="1"/>
           <p:nvPr/>
         </p:nvSpPr>
@@ -9957,7 +10240,7 @@
       </p:sp>
       <p:sp>
         <p:nvSpPr>
-          <p:cNvPr id="8" name="Text 5"/>
+          <p:cNvPr id="11" name="Text 8"/>
           <p:cNvSpPr txBox="1"/>
           <p:nvPr/>
         </p:nvSpPr>
@@ -10157,7 +10440,7 @@
         <p:spPr>
           <a:xfrm>
             <a:off x="640080" y="1691640"/>
-            <a:ext cx="8686800" cy="4480560"/>
+            <a:ext cx="8686800" cy="3017520"/>
           </a:xfrm>
           <a:prstGeom prst="rect">
             <a:avLst/>
@@ -10277,7 +10560,107 @@
       </p:sp>
       <p:sp>
         <p:nvSpPr>
-          <p:cNvPr id="7" name="Text 4"/>
+          <p:cNvPr id="7" name="Shape 4"/>
+          <p:cNvSpPr/>
+          <p:nvPr/>
+        </p:nvSpPr>
+        <p:spPr>
+          <a:xfrm>
+            <a:off x="640080" y="4892040"/>
+            <a:ext cx="10908792" cy="1143000"/>
+          </a:xfrm>
+          <a:prstGeom prst="roundRect">
+            <a:avLst>
+              <a:gd name="adj" fmla="val 8000"/>
+            </a:avLst>
+          </a:prstGeom>
+          <a:solidFill>
+            <a:srgbClr val="F5F8FF"/>
+          </a:solidFill>
+          <a:ln/>
+        </p:spPr>
+      </p:sp>
+      <p:sp>
+        <p:nvSpPr>
+          <p:cNvPr id="8" name="Text 5"/>
+          <p:cNvSpPr txBox="1"/>
+          <p:nvPr/>
+        </p:nvSpPr>
+        <p:spPr>
+          <a:xfrm>
+            <a:off x="914400" y="5029200"/>
+            <a:ext cx="10332720" cy="274320"/>
+          </a:xfrm>
+          <a:prstGeom prst="rect">
+            <a:avLst/>
+          </a:prstGeom>
+          <a:noFill/>
+          <a:ln/>
+        </p:spPr>
+        <p:txBody>
+          <a:bodyPr wrap="square" lIns="0" tIns="0" rIns="0" bIns="0" rtlCol="0" anchor="ctr"/>
+          <a:lstStyle/>
+          <a:p>
+            <a:pPr indent="0" marL="0">
+              <a:buNone/>
+            </a:pPr>
+            <a:r>
+              <a:rPr lang="en-US" sz="1100" b="1" spc="150" kern="0" dirty="0">
+                <a:solidFill>
+                  <a:srgbClr val="C9A227"/>
+                </a:solidFill>
+                <a:latin typeface="Calibri" pitchFamily="34" charset="0"/>
+                <a:ea typeface="Calibri" pitchFamily="34" charset="-122"/>
+                <a:cs typeface="Calibri" pitchFamily="34" charset="-120"/>
+              </a:rPr>
+              <a:t>WHY IT MATTERS</a:t>
+            </a:r>
+            <a:endParaRPr lang="en-US" sz="1100" dirty="0"/>
+          </a:p>
+        </p:txBody>
+      </p:sp>
+      <p:sp>
+        <p:nvSpPr>
+          <p:cNvPr id="9" name="Text 6"/>
+          <p:cNvSpPr txBox="1"/>
+          <p:nvPr/>
+        </p:nvSpPr>
+        <p:spPr>
+          <a:xfrm>
+            <a:off x="914400" y="5321808"/>
+            <a:ext cx="10332720" cy="640080"/>
+          </a:xfrm>
+          <a:prstGeom prst="rect">
+            <a:avLst/>
+          </a:prstGeom>
+          <a:noFill/>
+          <a:ln/>
+        </p:spPr>
+        <p:txBody>
+          <a:bodyPr wrap="square" lIns="0" tIns="0" rIns="0" bIns="0" rtlCol="0" anchor="t"/>
+          <a:lstStyle/>
+          <a:p>
+            <a:pPr indent="0" marL="0">
+              <a:buNone/>
+            </a:pPr>
+            <a:r>
+              <a:rPr lang="en-US" sz="1350" i="1" dirty="0">
+                <a:solidFill>
+                  <a:srgbClr val="1E2761"/>
+                </a:solidFill>
+                <a:latin typeface="Calibri" pitchFamily="34" charset="0"/>
+                <a:ea typeface="Calibri" pitchFamily="34" charset="-122"/>
+                <a:cs typeface="Calibri" pitchFamily="34" charset="-120"/>
+              </a:rPr>
+              <a:t>A forger who edits a statement in Photoshop almost always leaves that tool's name inside the file's own metadata - a check no human reviewer thinks to look for.</a:t>
+            </a:r>
+            <a:endParaRPr lang="en-US" sz="1350" dirty="0"/>
+          </a:p>
+        </p:txBody>
+      </p:sp>
+      <p:sp>
+        <p:nvSpPr>
+          <p:cNvPr id="10" name="Text 7"/>
           <p:cNvSpPr txBox="1"/>
           <p:nvPr/>
         </p:nvSpPr>
@@ -10316,7 +10699,7 @@
       </p:sp>
       <p:sp>
         <p:nvSpPr>
-          <p:cNvPr id="8" name="Text 5"/>
+          <p:cNvPr id="11" name="Text 8"/>
           <p:cNvSpPr txBox="1"/>
           <p:nvPr/>
         </p:nvSpPr>
@@ -10938,7 +11321,7 @@
         <p:spPr>
           <a:xfrm>
             <a:off x="640080" y="1691640"/>
-            <a:ext cx="8686800" cy="4480560"/>
+            <a:ext cx="8686800" cy="3017520"/>
           </a:xfrm>
           <a:prstGeom prst="rect">
             <a:avLst/>
@@ -11058,7 +11441,107 @@
       </p:sp>
       <p:sp>
         <p:nvSpPr>
-          <p:cNvPr id="7" name="Text 4"/>
+          <p:cNvPr id="7" name="Shape 4"/>
+          <p:cNvSpPr/>
+          <p:nvPr/>
+        </p:nvSpPr>
+        <p:spPr>
+          <a:xfrm>
+            <a:off x="640080" y="4892040"/>
+            <a:ext cx="10908792" cy="1143000"/>
+          </a:xfrm>
+          <a:prstGeom prst="roundRect">
+            <a:avLst>
+              <a:gd name="adj" fmla="val 8000"/>
+            </a:avLst>
+          </a:prstGeom>
+          <a:solidFill>
+            <a:srgbClr val="F5F8FF"/>
+          </a:solidFill>
+          <a:ln/>
+        </p:spPr>
+      </p:sp>
+      <p:sp>
+        <p:nvSpPr>
+          <p:cNvPr id="8" name="Text 5"/>
+          <p:cNvSpPr txBox="1"/>
+          <p:nvPr/>
+        </p:nvSpPr>
+        <p:spPr>
+          <a:xfrm>
+            <a:off x="914400" y="5029200"/>
+            <a:ext cx="10332720" cy="274320"/>
+          </a:xfrm>
+          <a:prstGeom prst="rect">
+            <a:avLst/>
+          </a:prstGeom>
+          <a:noFill/>
+          <a:ln/>
+        </p:spPr>
+        <p:txBody>
+          <a:bodyPr wrap="square" lIns="0" tIns="0" rIns="0" bIns="0" rtlCol="0" anchor="ctr"/>
+          <a:lstStyle/>
+          <a:p>
+            <a:pPr indent="0" marL="0">
+              <a:buNone/>
+            </a:pPr>
+            <a:r>
+              <a:rPr lang="en-US" sz="1100" b="1" spc="150" kern="0" dirty="0">
+                <a:solidFill>
+                  <a:srgbClr val="C9A227"/>
+                </a:solidFill>
+                <a:latin typeface="Calibri" pitchFamily="34" charset="0"/>
+                <a:ea typeface="Calibri" pitchFamily="34" charset="-122"/>
+                <a:cs typeface="Calibri" pitchFamily="34" charset="-120"/>
+              </a:rPr>
+              <a:t>WHY IT MATTERS</a:t>
+            </a:r>
+            <a:endParaRPr lang="en-US" sz="1100" dirty="0"/>
+          </a:p>
+        </p:txBody>
+      </p:sp>
+      <p:sp>
+        <p:nvSpPr>
+          <p:cNvPr id="9" name="Text 6"/>
+          <p:cNvSpPr txBox="1"/>
+          <p:nvPr/>
+        </p:nvSpPr>
+        <p:spPr>
+          <a:xfrm>
+            <a:off x="914400" y="5321808"/>
+            <a:ext cx="10332720" cy="640080"/>
+          </a:xfrm>
+          <a:prstGeom prst="rect">
+            <a:avLst/>
+          </a:prstGeom>
+          <a:noFill/>
+          <a:ln/>
+        </p:spPr>
+        <p:txBody>
+          <a:bodyPr wrap="square" lIns="0" tIns="0" rIns="0" bIns="0" rtlCol="0" anchor="t"/>
+          <a:lstStyle/>
+          <a:p>
+            <a:pPr indent="0" marL="0">
+              <a:buNone/>
+            </a:pPr>
+            <a:r>
+              <a:rPr lang="en-US" sz="1350" i="1" dirty="0">
+                <a:solidFill>
+                  <a:srgbClr val="1E2761"/>
+                </a:solidFill>
+                <a:latin typeface="Calibri" pitchFamily="34" charset="0"/>
+                <a:ea typeface="Calibri" pitchFamily="34" charset="-122"/>
+                <a:cs typeface="Calibri" pitchFamily="34" charset="-120"/>
+              </a:rPr>
+              <a:t>Most fraud-detection demos only work on the exact file they were built for - this pipeline explicitly tells the officer when it cannot read a document, rather than silently guessing.</a:t>
+            </a:r>
+            <a:endParaRPr lang="en-US" sz="1350" dirty="0"/>
+          </a:p>
+        </p:txBody>
+      </p:sp>
+      <p:sp>
+        <p:nvSpPr>
+          <p:cNvPr id="10" name="Text 7"/>
           <p:cNvSpPr txBox="1"/>
           <p:nvPr/>
         </p:nvSpPr>
@@ -11097,7 +11580,7 @@
       </p:sp>
       <p:sp>
         <p:nvSpPr>
-          <p:cNvPr id="8" name="Text 5"/>
+          <p:cNvPr id="11" name="Text 8"/>
           <p:cNvSpPr txBox="1"/>
           <p:nvPr/>
         </p:nvSpPr>

--- a/AI-Driven-Loan-Underwriting-Presentation.pptx
+++ b/AI-Driven-Loan-Underwriting-Presentation.pptx
@@ -19,6 +19,9 @@
     <p:sldId id="267" r:id="rId13"/>
     <p:sldId id="268" r:id="rId14"/>
     <p:sldId id="269" r:id="rId15"/>
+    <p:sldId id="271" r:id="rId22"/>
+    <p:sldId id="272" r:id="rId23"/>
+    <p:sldId id="273" r:id="rId24"/>
     <p:sldId id="270" r:id="rId16"/>
   </p:sldIdLst>
   <p:notesMasterIdLst>
@@ -6719,6 +6722,1560 @@
 
 <file path=ppt/slides/slide15.xml><?xml version="1.0" encoding="utf-8"?>
 <p:sld xmlns:a="http://schemas.openxmlformats.org/drawingml/2006/main" xmlns:r="http://schemas.openxmlformats.org/officeDocument/2006/relationships" xmlns:p="http://schemas.openxmlformats.org/presentationml/2006/main">
+  <p:cSld name="Slide 6">
+    <p:bg>
+      <p:bgPr>
+        <a:solidFill>
+          <a:srgbClr val="FFFFFF"/>
+        </a:solidFill>
+      </p:bgPr>
+    </p:bg>
+    <p:spTree>
+      <p:nvGrpSpPr>
+        <p:cNvPr id="1" name=""/>
+        <p:cNvGrpSpPr/>
+        <p:nvPr/>
+      </p:nvGrpSpPr>
+      <p:grpSpPr>
+        <a:xfrm>
+          <a:off x="0" y="0"/>
+          <a:ext cx="0" cy="0"/>
+          <a:chOff x="0" y="0"/>
+          <a:chExt cx="0" cy="0"/>
+        </a:xfrm>
+      </p:grpSpPr>
+      <p:sp>
+        <p:nvSpPr>
+          <p:cNvPr id="2" name="Text 0"/>
+          <p:cNvSpPr txBox="1"/>
+          <p:nvPr/>
+        </p:nvSpPr>
+        <p:spPr>
+          <a:xfrm>
+            <a:off x="2240280" y="502920"/>
+            <a:ext cx="9281160" cy="320040"/>
+          </a:xfrm>
+          <a:prstGeom prst="rect">
+            <a:avLst/>
+          </a:prstGeom>
+          <a:noFill/>
+          <a:ln/>
+        </p:spPr>
+        <p:txBody>
+          <a:bodyPr wrap="square" lIns="0" tIns="0" rIns="0" bIns="0" rtlCol="0" anchor="ctr"/>
+          <a:lstStyle/>
+          <a:p>
+            <a:pPr indent="0" marL="0">
+              <a:buNone/>
+            </a:pPr>
+            <a:r>
+              <a:rPr lang="en-US" sz="1200" b="1" spc="200" kern="0" dirty="0">
+                <a:solidFill>
+                  <a:srgbClr val="C9A227"/>
+                </a:solidFill>
+                <a:latin typeface="Calibri" pitchFamily="34" charset="0"/>
+                <a:ea typeface="Calibri" pitchFamily="34" charset="-122"/>
+                <a:cs typeface="Calibri" pitchFamily="34" charset="-120"/>
+              </a:rPr>
+              <a:t>DESIGN UPDATE</a:t>
+            </a:r>
+            <a:endParaRPr lang="en-US" sz="1200" dirty="0"/>
+          </a:p>
+        </p:txBody>
+      </p:sp>
+      <p:sp>
+        <p:nvSpPr>
+          <p:cNvPr id="3" name="Text 1"/>
+          <p:cNvSpPr txBox="1"/>
+          <p:nvPr/>
+        </p:nvSpPr>
+        <p:spPr>
+          <a:xfrm>
+            <a:off x="2240280" y="822960"/>
+            <a:ext cx="9281160" cy="640080"/>
+          </a:xfrm>
+          <a:prstGeom prst="rect">
+            <a:avLst/>
+          </a:prstGeom>
+          <a:noFill/>
+          <a:ln/>
+        </p:spPr>
+        <p:txBody>
+          <a:bodyPr wrap="square" lIns="0" tIns="0" rIns="0" bIns="0" rtlCol="0" anchor="ctr"/>
+          <a:lstStyle/>
+          <a:p>
+            <a:pPr indent="0" marL="0">
+              <a:buNone/>
+            </a:pPr>
+            <a:r>
+              <a:rPr lang="en-US" sz="2400" b="1" dirty="0">
+                <a:solidFill>
+                  <a:srgbClr val="1E2761"/>
+                </a:solidFill>
+                <a:latin typeface="Cambria" pitchFamily="34" charset="0"/>
+                <a:ea typeface="Cambria" pitchFamily="34" charset="-122"/>
+                <a:cs typeface="Cambria" pitchFamily="34" charset="-120"/>
+              </a:rPr>
+              <a:t>Asynchronous Processing Pipeline</a:t>
+            </a:r>
+            <a:endParaRPr lang="en-US" sz="2400" dirty="0"/>
+          </a:p>
+        </p:txBody>
+      </p:sp>
+      <p:sp>
+        <p:nvSpPr>
+          <p:cNvPr id="4" name="Shape 2"/>
+          <p:cNvSpPr/>
+          <p:nvPr/>
+        </p:nvSpPr>
+        <p:spPr>
+          <a:xfrm>
+            <a:off x="640080" y="548640"/>
+            <a:ext cx="1371600" cy="1371600"/>
+          </a:xfrm>
+          <a:prstGeom prst="ellipse">
+            <a:avLst/>
+          </a:prstGeom>
+          <a:solidFill>
+            <a:srgbClr val="1E2761"/>
+          </a:solidFill>
+          <a:ln/>
+        </p:spPr>
+      </p:sp>
+      <p:pic>
+        <p:nvPicPr>
+          <p:cNvPr id="5" name="Image 0" descr="preencoded.png">    </p:cNvPr>
+          <p:cNvPicPr>
+            <a:picLocks noChangeAspect="1"/>
+          </p:cNvPicPr>
+          <p:nvPr/>
+        </p:nvPicPr>
+        <p:blipFill>
+          <a:blip r:embed="rId1"/>
+          <a:stretch>
+            <a:fillRect/>
+          </a:stretch>
+        </p:blipFill>
+        <p:spPr>
+          <a:xfrm>
+            <a:off x="804672" y="713232"/>
+            <a:ext cx="1042416" cy="1042416"/>
+          </a:xfrm>
+          <a:prstGeom prst="rect">
+            <a:avLst/>
+          </a:prstGeom>
+        </p:spPr>
+      </p:pic>
+      <p:sp>
+        <p:nvSpPr>
+          <p:cNvPr id="6" name="Text 3"/>
+          <p:cNvSpPr txBox="1"/>
+          <p:nvPr/>
+        </p:nvSpPr>
+        <p:spPr>
+          <a:xfrm>
+            <a:off x="2240280" y="1691640"/>
+            <a:ext cx="9281160" cy="3017520"/>
+          </a:xfrm>
+          <a:prstGeom prst="rect">
+            <a:avLst/>
+          </a:prstGeom>
+          <a:noFill/>
+          <a:ln/>
+        </p:spPr>
+        <p:txBody>
+          <a:bodyPr wrap="square" lIns="0" tIns="0" rIns="0" bIns="0" rtlCol="0" anchor="t"/>
+          <a:lstStyle/>
+          <a:p>
+            <a:pPr marL="228600" indent="-228600">
+              <a:spcAft>
+                <a:spcPts val="1400"/>
+              </a:spcAft>
+              <a:buSzPct val="100000"/>
+              <a:buChar char="▪"/>
+            </a:pPr>
+            <a:r>
+              <a:rPr lang="en-US" sz="1500" dirty="0">
+                <a:solidFill>
+                  <a:srgbClr val="1B1B2F"/>
+                </a:solidFill>
+                <a:latin typeface="Calibri" pitchFamily="34" charset="0"/>
+                <a:ea typeface="Calibri" pitchFamily="34" charset="-122"/>
+                <a:cs typeface="Calibri" pitchFamily="34" charset="-120"/>
+              </a:rPr>
+              <a:t>Upload request now does fast, synchronous validation only (magic-byte check) - nothing else blocks the response</a:t>
+            </a:r>
+            <a:endParaRPr lang="en-US" sz="1500" dirty="0"/>
+          </a:p>
+          <a:p>
+            <a:pPr marL="228600" indent="-228600">
+              <a:spcAft>
+                <a:spcPts val="1400"/>
+              </a:spcAft>
+              <a:buSzPct val="100000"/>
+              <a:buChar char="▪"/>
+            </a:pPr>
+            <a:r>
+              <a:rPr lang="en-US" sz="1500" dirty="0">
+                <a:solidFill>
+                  <a:srgbClr val="1B1B2F"/>
+                </a:solidFill>
+                <a:latin typeface="Calibri" pitchFamily="34" charset="0"/>
+                <a:ea typeface="Calibri" pitchFamily="34" charset="-122"/>
+                <a:cs typeface="Calibri" pitchFamily="34" charset="-120"/>
+              </a:rPr>
+              <a:t>Application flips to PROCESSING and the HTTP response returns immediately - measured consistently under 50ms</a:t>
+            </a:r>
+            <a:endParaRPr lang="en-US" sz="1500" dirty="0"/>
+          </a:p>
+          <a:p>
+            <a:pPr marL="228600" indent="-228600">
+              <a:spcAft>
+                <a:spcPts val="1400"/>
+              </a:spcAft>
+              <a:buSzPct val="100000"/>
+              <a:buChar char="▪"/>
+            </a:pPr>
+            <a:r>
+              <a:rPr lang="en-US" sz="1500" dirty="0">
+                <a:solidFill>
+                  <a:srgbClr val="1B1B2F"/>
+                </a:solidFill>
+                <a:latin typeface="Calibri" pitchFamily="34" charset="0"/>
+                <a:ea typeface="Calibri" pitchFamily="34" charset="-122"/>
+                <a:cs typeface="Calibri" pitchFamily="34" charset="-120"/>
+              </a:rPr>
+              <a:t>Forensics, ledger reconciliation and XGBoost scoring then run in the background, not blocking the applicant</a:t>
+            </a:r>
+            <a:endParaRPr lang="en-US" sz="1500" dirty="0"/>
+          </a:p>
+          <a:p>
+            <a:pPr marL="228600" indent="-228600">
+              <a:spcAft>
+                <a:spcPts val="1400"/>
+              </a:spcAft>
+              <a:buSzPct val="100000"/>
+              <a:buChar char="▪"/>
+            </a:pPr>
+            <a:r>
+              <a:rPr lang="en-US" sz="1500" dirty="0">
+                <a:solidFill>
+                  <a:srgbClr val="1B1B2F"/>
+                </a:solidFill>
+                <a:latin typeface="Calibri" pitchFamily="34" charset="0"/>
+                <a:ea typeface="Calibri" pitchFamily="34" charset="-122"/>
+                <a:cs typeface="Calibri" pitchFamily="34" charset="-120"/>
+              </a:rPr>
+              <a:t>Frontend polls every 2.5 seconds while the application is mid-pipeline - the UI updates itself, no manual refresh</a:t>
+            </a:r>
+            <a:endParaRPr lang="en-US" sz="1500" dirty="0"/>
+          </a:p>
+          <a:p>
+            <a:pPr marL="228600" indent="-228600">
+              <a:spcAft>
+                <a:spcPts val="1400"/>
+              </a:spcAft>
+              <a:buSzPct val="100000"/>
+              <a:buChar char="▪"/>
+            </a:pPr>
+            <a:r>
+              <a:rPr lang="en-US" sz="1500" dirty="0">
+                <a:solidFill>
+                  <a:srgbClr val="1B1B2F"/>
+                </a:solidFill>
+                <a:latin typeface="Calibri" pitchFamily="34" charset="0"/>
+                <a:ea typeface="Calibri" pitchFamily="34" charset="-122"/>
+                <a:cs typeface="Calibri" pitchFamily="34" charset="-120"/>
+              </a:rPr>
+              <a:t>A missing/wrong PDF password now surfaces as a PASSWORD_REQUIRED status instead of losing the submission</a:t>
+            </a:r>
+            <a:endParaRPr lang="en-US" sz="1500" dirty="0"/>
+          </a:p>
+        </p:txBody>
+      </p:sp>
+      <p:sp>
+        <p:nvSpPr>
+          <p:cNvPr id="7" name="Shape 4"/>
+          <p:cNvSpPr/>
+          <p:nvPr/>
+        </p:nvSpPr>
+        <p:spPr>
+          <a:xfrm>
+            <a:off x="640080" y="4892040"/>
+            <a:ext cx="10908792" cy="1143000"/>
+          </a:xfrm>
+          <a:prstGeom prst="roundRect">
+            <a:avLst>
+              <a:gd name="adj" fmla="val 8000"/>
+            </a:avLst>
+          </a:prstGeom>
+          <a:solidFill>
+            <a:srgbClr val="F5F8FF"/>
+          </a:solidFill>
+          <a:ln/>
+        </p:spPr>
+      </p:sp>
+      <p:sp>
+        <p:nvSpPr>
+          <p:cNvPr id="8" name="Text 5"/>
+          <p:cNvSpPr txBox="1"/>
+          <p:nvPr/>
+        </p:nvSpPr>
+        <p:spPr>
+          <a:xfrm>
+            <a:off x="914400" y="5029200"/>
+            <a:ext cx="10332720" cy="274320"/>
+          </a:xfrm>
+          <a:prstGeom prst="rect">
+            <a:avLst/>
+          </a:prstGeom>
+          <a:noFill/>
+          <a:ln/>
+        </p:spPr>
+        <p:txBody>
+          <a:bodyPr wrap="square" lIns="0" tIns="0" rIns="0" bIns="0" rtlCol="0" anchor="ctr"/>
+          <a:lstStyle/>
+          <a:p>
+            <a:pPr indent="0" marL="0">
+              <a:buNone/>
+            </a:pPr>
+            <a:r>
+              <a:rPr lang="en-US" sz="1100" b="1" spc="150" kern="0" dirty="0">
+                <a:solidFill>
+                  <a:srgbClr val="C9A227"/>
+                </a:solidFill>
+                <a:latin typeface="Calibri" pitchFamily="34" charset="0"/>
+                <a:ea typeface="Calibri" pitchFamily="34" charset="-122"/>
+                <a:cs typeface="Calibri" pitchFamily="34" charset="-120"/>
+              </a:rPr>
+              <a:t>WHY IT MATTERS</a:t>
+            </a:r>
+            <a:endParaRPr lang="en-US" sz="1100" dirty="0"/>
+          </a:p>
+        </p:txBody>
+      </p:sp>
+      <p:sp>
+        <p:nvSpPr>
+          <p:cNvPr id="9" name="Text 6"/>
+          <p:cNvSpPr txBox="1"/>
+          <p:nvPr/>
+        </p:nvSpPr>
+        <p:spPr>
+          <a:xfrm>
+            <a:off x="914400" y="5321808"/>
+            <a:ext cx="10332720" cy="640080"/>
+          </a:xfrm>
+          <a:prstGeom prst="rect">
+            <a:avLst/>
+          </a:prstGeom>
+          <a:noFill/>
+          <a:ln/>
+        </p:spPr>
+        <p:txBody>
+          <a:bodyPr wrap="square" lIns="0" tIns="0" rIns="0" bIns="0" rtlCol="0" anchor="t"/>
+          <a:lstStyle/>
+          <a:p>
+            <a:pPr indent="0" marL="0">
+              <a:buNone/>
+            </a:pPr>
+            <a:r>
+              <a:rPr lang="en-US" sz="1350" i="1" dirty="0">
+                <a:solidFill>
+                  <a:srgbClr val="1E2761"/>
+                </a:solidFill>
+                <a:latin typeface="Calibri" pitchFamily="34" charset="0"/>
+                <a:ea typeface="Calibri" pitchFamily="34" charset="-122"/>
+                <a:cs typeface="Calibri" pitchFamily="34" charset="-120"/>
+              </a:rPr>
+              <a:t>The original synchronous design made the applicant's browser wait several seconds mid-submission for forensics to finish - the submit button now responds instantly and the result simply appears once ready.</a:t>
+            </a:r>
+            <a:endParaRPr lang="en-US" sz="1350" dirty="0"/>
+          </a:p>
+        </p:txBody>
+      </p:sp>
+      <p:sp>
+        <p:nvSpPr>
+          <p:cNvPr id="10" name="Text 7"/>
+          <p:cNvSpPr txBox="1"/>
+          <p:nvPr/>
+        </p:nvSpPr>
+        <p:spPr>
+          <a:xfrm>
+            <a:off x="457200" y="6510528"/>
+            <a:ext cx="8229600" cy="274320"/>
+          </a:xfrm>
+          <a:prstGeom prst="rect">
+            <a:avLst/>
+          </a:prstGeom>
+          <a:noFill/>
+          <a:ln/>
+        </p:spPr>
+        <p:txBody>
+          <a:bodyPr wrap="square" lIns="0" tIns="0" rIns="0" bIns="0" rtlCol="0" anchor="ctr"/>
+          <a:lstStyle/>
+          <a:p>
+            <a:pPr indent="0" marL="0">
+              <a:buNone/>
+            </a:pPr>
+            <a:r>
+              <a:rPr lang="en-US" sz="900" dirty="0">
+                <a:solidFill>
+                  <a:srgbClr val="5B6B8C"/>
+                </a:solidFill>
+                <a:latin typeface="Calibri" pitchFamily="34" charset="0"/>
+                <a:ea typeface="Calibri" pitchFamily="34" charset="-122"/>
+                <a:cs typeface="Calibri" pitchFamily="34" charset="-120"/>
+              </a:rPr>
+              <a:t>AI-Driven Loan Underwriting &amp; Document Fraud Detection</a:t>
+            </a:r>
+            <a:endParaRPr lang="en-US" sz="900" dirty="0"/>
+          </a:p>
+        </p:txBody>
+      </p:sp>
+      <p:sp>
+        <p:nvSpPr>
+          <p:cNvPr id="11" name="Text 8"/>
+          <p:cNvSpPr txBox="1"/>
+          <p:nvPr/>
+        </p:nvSpPr>
+        <p:spPr>
+          <a:xfrm>
+            <a:off x="11430000" y="6510528"/>
+            <a:ext cx="365760" cy="274320"/>
+          </a:xfrm>
+          <a:prstGeom prst="rect">
+            <a:avLst/>
+          </a:prstGeom>
+          <a:noFill/>
+          <a:ln/>
+        </p:spPr>
+        <p:txBody>
+          <a:bodyPr wrap="square" lIns="0" tIns="0" rIns="0" bIns="0" rtlCol="0" anchor="ctr"/>
+          <a:lstStyle/>
+          <a:p>
+            <a:pPr algn="r" indent="0" marL="0">
+              <a:buNone/>
+            </a:pPr>
+            <a:r>
+              <a:rPr lang="en-US" sz="900" dirty="0">
+                <a:solidFill>
+                  <a:srgbClr val="5B6B8C"/>
+                </a:solidFill>
+                <a:latin typeface="Calibri" pitchFamily="34" charset="0"/>
+                <a:ea typeface="Calibri" pitchFamily="34" charset="-122"/>
+                <a:cs typeface="Calibri" pitchFamily="34" charset="-120"/>
+              </a:rPr>
+              <a:t>15</a:t>
+            </a:r>
+            <a:endParaRPr lang="en-US" sz="900" dirty="0"/>
+          </a:p>
+        </p:txBody>
+      </p:sp>
+    </p:spTree>
+  </p:cSld>
+  <p:clrMapOvr>
+    <a:masterClrMapping/>
+  </p:clrMapOvr>
+</p:sld>
+</file>
+
+<file path=ppt/slides/slide16.xml><?xml version="1.0" encoding="utf-8"?>
+<p:sld xmlns:a="http://schemas.openxmlformats.org/drawingml/2006/main" xmlns:r="http://schemas.openxmlformats.org/officeDocument/2006/relationships" xmlns:p="http://schemas.openxmlformats.org/presentationml/2006/main">
+  <p:cSld name="Slide 2">
+    <p:bg>
+      <p:bgPr>
+        <a:solidFill>
+          <a:srgbClr val="FFFFFF"/>
+        </a:solidFill>
+      </p:bgPr>
+    </p:bg>
+    <p:spTree>
+      <p:nvGrpSpPr>
+        <p:cNvPr id="1" name=""/>
+        <p:cNvGrpSpPr/>
+        <p:nvPr/>
+      </p:nvGrpSpPr>
+      <p:grpSpPr>
+        <a:xfrm>
+          <a:off x="0" y="0"/>
+          <a:ext cx="0" cy="0"/>
+          <a:chOff x="0" y="0"/>
+          <a:chExt cx="0" cy="0"/>
+        </a:xfrm>
+      </p:grpSpPr>
+      <p:sp>
+        <p:nvSpPr>
+          <p:cNvPr id="2" name="Text 0"/>
+          <p:cNvSpPr txBox="1"/>
+          <p:nvPr/>
+        </p:nvSpPr>
+        <p:spPr>
+          <a:xfrm>
+            <a:off x="548640" y="365760"/>
+            <a:ext cx="11064240" cy="640080"/>
+          </a:xfrm>
+          <a:prstGeom prst="rect">
+            <a:avLst/>
+          </a:prstGeom>
+          <a:noFill/>
+          <a:ln/>
+        </p:spPr>
+        <p:txBody>
+          <a:bodyPr wrap="square" lIns="0" tIns="0" rIns="0" bIns="0" rtlCol="0" anchor="ctr"/>
+          <a:lstStyle/>
+          <a:p>
+            <a:pPr indent="0" marL="0">
+              <a:buNone/>
+            </a:pPr>
+            <a:r>
+              <a:rPr lang="en-US" sz="3000" b="1" dirty="0">
+                <a:solidFill>
+                  <a:srgbClr val="1E2761"/>
+                </a:solidFill>
+                <a:latin typeface="Cambria" pitchFamily="34" charset="0"/>
+                <a:ea typeface="Cambria" pitchFamily="34" charset="-122"/>
+                <a:cs typeface="Cambria" pitchFamily="34" charset="-120"/>
+              </a:rPr>
+              <a:t>Dataset &amp; Model - Measured, Not Assumed</a:t>
+            </a:r>
+            <a:endParaRPr lang="en-US" sz="3000" dirty="0"/>
+          </a:p>
+        </p:txBody>
+      </p:sp>
+      <p:sp>
+        <p:nvSpPr>
+          <p:cNvPr id="3" name="Text 1"/>
+          <p:cNvSpPr txBox="1"/>
+          <p:nvPr/>
+        </p:nvSpPr>
+        <p:spPr>
+          <a:xfrm>
+            <a:off x="548640" y="960120"/>
+            <a:ext cx="11064240" cy="365760"/>
+          </a:xfrm>
+          <a:prstGeom prst="rect">
+            <a:avLst/>
+          </a:prstGeom>
+          <a:noFill/>
+          <a:ln/>
+        </p:spPr>
+        <p:txBody>
+          <a:bodyPr wrap="square" lIns="0" tIns="0" rIns="0" bIns="0" rtlCol="0" anchor="ctr"/>
+          <a:lstStyle/>
+          <a:p>
+            <a:pPr indent="0" marL="0">
+              <a:buNone/>
+            </a:pPr>
+            <a:r>
+              <a:rPr lang="en-US" sz="1400" i="1" dirty="0">
+                <a:solidFill>
+                  <a:srgbClr val="5B6B8C"/>
+                </a:solidFill>
+                <a:latin typeface="Calibri" pitchFamily="34" charset="0"/>
+                <a:ea typeface="Calibri" pitchFamily="34" charset="-122"/>
+                <a:cs typeface="Calibri" pitchFamily="34" charset="-120"/>
+              </a:rPr>
+              <a:t>Real numbers pulled from the training data and the trained model itself, not estimated</a:t>
+            </a:r>
+            <a:endParaRPr lang="en-US" sz="1400" dirty="0"/>
+          </a:p>
+        </p:txBody>
+      </p:sp>
+      <p:sp>
+        <p:nvSpPr>
+          <p:cNvPr id="4" name="Text 2"/>
+          <p:cNvSpPr txBox="1"/>
+          <p:nvPr/>
+        </p:nvSpPr>
+        <p:spPr>
+          <a:xfrm>
+            <a:off x="548640" y="1600200"/>
+            <a:ext cx="6400800" cy="4389120"/>
+          </a:xfrm>
+          <a:prstGeom prst="rect">
+            <a:avLst/>
+          </a:prstGeom>
+          <a:noFill/>
+          <a:ln/>
+        </p:spPr>
+        <p:txBody>
+          <a:bodyPr wrap="square" lIns="0" tIns="0" rIns="0" bIns="0" rtlCol="0" anchor="t"/>
+          <a:lstStyle/>
+          <a:p>
+            <a:pPr marL="228600" indent="-228600">
+              <a:spcAft>
+                <a:spcPts val="1400"/>
+              </a:spcAft>
+              <a:buSzPct val="100000"/>
+              <a:buChar char="▪"/>
+            </a:pPr>
+            <a:r>
+              <a:rPr lang="en-US" sz="1500" dirty="0">
+                <a:solidFill>
+                  <a:srgbClr val="1B1B2F"/>
+                </a:solidFill>
+                <a:latin typeface="Calibri" pitchFamily="34" charset="0"/>
+                <a:ea typeface="Calibri" pitchFamily="34" charset="-122"/>
+                <a:cs typeface="Calibri" pitchFamily="34" charset="-120"/>
+              </a:rPr>
+              <a:t>150,000 borrower records from the public “Give Me Some Credit” dataset</a:t>
+            </a:r>
+            <a:endParaRPr lang="en-US" sz="1500" dirty="0"/>
+          </a:p>
+          <a:p>
+            <a:pPr marL="228600" indent="-228600">
+              <a:spcAft>
+                <a:spcPts val="1400"/>
+              </a:spcAft>
+              <a:buSzPct val="100000"/>
+              <a:buChar char="▪"/>
+            </a:pPr>
+            <a:r>
+              <a:rPr lang="en-US" sz="1500" dirty="0">
+                <a:solidFill>
+                  <a:srgbClr val="1B1B2F"/>
+                </a:solidFill>
+                <a:latin typeface="Calibri" pitchFamily="34" charset="0"/>
+                <a:ea typeface="Calibri" pitchFamily="34" charset="-122"/>
+                <a:cs typeface="Calibri" pitchFamily="34" charset="-120"/>
+              </a:rPr>
+              <a:t>6.68% positive label rate (serious delinquency) - a realistic class imbalance, not a synthetic balance</a:t>
+            </a:r>
+            <a:endParaRPr lang="en-US" sz="1500" dirty="0"/>
+          </a:p>
+          <a:p>
+            <a:pPr marL="228600" indent="-228600">
+              <a:spcAft>
+                <a:spcPts val="1400"/>
+              </a:spcAft>
+              <a:buSzPct val="100000"/>
+              <a:buChar char="▪"/>
+            </a:pPr>
+            <a:r>
+              <a:rPr lang="en-US" sz="1500" dirty="0">
+                <a:solidFill>
+                  <a:srgbClr val="1B1B2F"/>
+                </a:solidFill>
+                <a:latin typeface="Calibri" pitchFamily="34" charset="0"/>
+                <a:ea typeface="Calibri" pitchFamily="34" charset="-122"/>
+                <a:cs typeface="Calibri" pitchFamily="34" charset="-120"/>
+              </a:rPr>
+              <a:t>19.8% of records missing MonthlyIncome, 2.6% missing NumberOfDependents - median-imputed, never dropped</a:t>
+            </a:r>
+            <a:endParaRPr lang="en-US" sz="1500" dirty="0"/>
+          </a:p>
+          <a:p>
+            <a:pPr marL="228600" indent="-228600">
+              <a:spcAft>
+                <a:spcPts val="1400"/>
+              </a:spcAft>
+              <a:buSzPct val="100000"/>
+              <a:buChar char="▪"/>
+            </a:pPr>
+            <a:r>
+              <a:rPr lang="en-US" sz="1500" dirty="0">
+                <a:solidFill>
+                  <a:srgbClr val="1B1B2F"/>
+                </a:solidFill>
+                <a:latin typeface="Calibri" pitchFamily="34" charset="0"/>
+                <a:ea typeface="Calibri" pitchFamily="34" charset="-122"/>
+                <a:cs typeface="Calibri" pitchFamily="34" charset="-120"/>
+              </a:rPr>
+              <a:t>A real data-quality issue was found and handled honestly: age values of 0 and 109 are clipped as data-entry artifacts, not treated as real borrowers</a:t>
+            </a:r>
+            <a:endParaRPr lang="en-US" sz="1500" dirty="0"/>
+          </a:p>
+          <a:p>
+            <a:pPr marL="228600" indent="-228600">
+              <a:spcAft>
+                <a:spcPts val="1400"/>
+              </a:spcAft>
+              <a:buSzPct val="100000"/>
+              <a:buChar char="▪"/>
+            </a:pPr>
+            <a:r>
+              <a:rPr lang="en-US" sz="1500" dirty="0">
+                <a:solidFill>
+                  <a:srgbClr val="1B1B2F"/>
+                </a:solidFill>
+                <a:latin typeface="Calibri" pitchFamily="34" charset="0"/>
+                <a:ea typeface="Calibri" pitchFamily="34" charset="-122"/>
+                <a:cs typeface="Calibri" pitchFamily="34" charset="-120"/>
+              </a:rPr>
+              <a:t>Feature importance read directly from the trained XGBoost model confirms delinquency history - not income - drives the score</a:t>
+            </a:r>
+            <a:endParaRPr lang="en-US" sz="1500" dirty="0"/>
+          </a:p>
+        </p:txBody>
+      </p:sp>
+      <p:sp>
+        <p:nvSpPr>
+          <p:cNvPr id="5" name="Shape 3"/>
+          <p:cNvSpPr/>
+          <p:nvPr/>
+        </p:nvSpPr>
+        <p:spPr>
+          <a:xfrm>
+            <a:off x="7315200" y="1691640"/>
+            <a:ext cx="4297680" cy="1417320"/>
+          </a:xfrm>
+          <a:prstGeom prst="roundRect">
+            <a:avLst>
+              <a:gd name="adj" fmla="val 7742"/>
+            </a:avLst>
+          </a:prstGeom>
+          <a:solidFill>
+            <a:srgbClr val="F5F8FF"/>
+          </a:solidFill>
+          <a:ln/>
+          <a:effectLst>
+            <a:outerShdw sx="100000" sy="100000" kx="0" ky="0" algn="bl" rotWithShape="0" blurRad="76200" dist="25400" dir="5400000">
+              <a:srgbClr val="9AA7C7">
+                <a:alpha val="35000"/>
+              </a:srgbClr>
+            </a:outerShdw>
+          </a:effectLst>
+        </p:spPr>
+      </p:sp>
+      <p:sp>
+        <p:nvSpPr>
+          <p:cNvPr id="6" name="Text 4"/>
+          <p:cNvSpPr txBox="1"/>
+          <p:nvPr/>
+        </p:nvSpPr>
+        <p:spPr>
+          <a:xfrm>
+            <a:off x="7315200" y="1801368"/>
+            <a:ext cx="4297680" cy="685800"/>
+          </a:xfrm>
+          <a:prstGeom prst="rect">
+            <a:avLst/>
+          </a:prstGeom>
+          <a:noFill/>
+          <a:ln/>
+        </p:spPr>
+        <p:txBody>
+          <a:bodyPr wrap="square" lIns="0" tIns="0" rIns="0" bIns="0" rtlCol="0" anchor="ctr"/>
+          <a:lstStyle/>
+          <a:p>
+            <a:pPr algn="ctr" indent="0" marL="0">
+              <a:buNone/>
+            </a:pPr>
+            <a:r>
+              <a:rPr lang="en-US" sz="3400" b="1" dirty="0">
+                <a:solidFill>
+                  <a:srgbClr val="1E2761"/>
+                </a:solidFill>
+                <a:latin typeface="Cambria" pitchFamily="34" charset="0"/>
+                <a:ea typeface="Cambria" pitchFamily="34" charset="-122"/>
+                <a:cs typeface="Cambria" pitchFamily="34" charset="-120"/>
+              </a:rPr>
+              <a:t>150,000</a:t>
+            </a:r>
+            <a:endParaRPr lang="en-US" sz="3400" dirty="0"/>
+          </a:p>
+        </p:txBody>
+      </p:sp>
+      <p:sp>
+        <p:nvSpPr>
+          <p:cNvPr id="7" name="Text 5"/>
+          <p:cNvSpPr txBox="1"/>
+          <p:nvPr/>
+        </p:nvSpPr>
+        <p:spPr>
+          <a:xfrm>
+            <a:off x="7498080" y="2560320"/>
+            <a:ext cx="3931920" cy="457200"/>
+          </a:xfrm>
+          <a:prstGeom prst="rect">
+            <a:avLst/>
+          </a:prstGeom>
+          <a:noFill/>
+          <a:ln/>
+        </p:spPr>
+        <p:txBody>
+          <a:bodyPr wrap="square" lIns="0" tIns="0" rIns="0" bIns="0" rtlCol="0" anchor="ctr"/>
+          <a:lstStyle/>
+          <a:p>
+            <a:pPr algn="ctr" indent="0" marL="0">
+              <a:buNone/>
+            </a:pPr>
+            <a:r>
+              <a:rPr lang="en-US" sz="1100" dirty="0">
+                <a:solidFill>
+                  <a:srgbClr val="5B6B8C"/>
+                </a:solidFill>
+                <a:latin typeface="Calibri" pitchFamily="34" charset="0"/>
+                <a:ea typeface="Calibri" pitchFamily="34" charset="-122"/>
+                <a:cs typeface="Calibri" pitchFamily="34" charset="-120"/>
+              </a:rPr>
+              <a:t>Training records used</a:t>
+            </a:r>
+            <a:endParaRPr lang="en-US" sz="1100" dirty="0"/>
+          </a:p>
+        </p:txBody>
+      </p:sp>
+      <p:sp>
+        <p:nvSpPr>
+          <p:cNvPr id="8" name="Shape 6"/>
+          <p:cNvSpPr/>
+          <p:nvPr/>
+        </p:nvSpPr>
+        <p:spPr>
+          <a:xfrm>
+            <a:off x="7315200" y="3337560"/>
+            <a:ext cx="4297680" cy="1417320"/>
+          </a:xfrm>
+          <a:prstGeom prst="roundRect">
+            <a:avLst>
+              <a:gd name="adj" fmla="val 7742"/>
+            </a:avLst>
+          </a:prstGeom>
+          <a:solidFill>
+            <a:srgbClr val="F5F8FF"/>
+          </a:solidFill>
+          <a:ln/>
+          <a:effectLst>
+            <a:outerShdw sx="100000" sy="100000" kx="0" ky="0" algn="bl" rotWithShape="0" blurRad="76200" dist="25400" dir="5400000">
+              <a:srgbClr val="9AA7C7">
+                <a:alpha val="35000"/>
+              </a:srgbClr>
+            </a:outerShdw>
+          </a:effectLst>
+        </p:spPr>
+      </p:sp>
+      <p:sp>
+        <p:nvSpPr>
+          <p:cNvPr id="9" name="Text 7"/>
+          <p:cNvSpPr txBox="1"/>
+          <p:nvPr/>
+        </p:nvSpPr>
+        <p:spPr>
+          <a:xfrm>
+            <a:off x="7315200" y="3447288"/>
+            <a:ext cx="4297680" cy="685800"/>
+          </a:xfrm>
+          <a:prstGeom prst="rect">
+            <a:avLst/>
+          </a:prstGeom>
+          <a:noFill/>
+          <a:ln/>
+        </p:spPr>
+        <p:txBody>
+          <a:bodyPr wrap="square" lIns="0" tIns="0" rIns="0" bIns="0" rtlCol="0" anchor="ctr"/>
+          <a:lstStyle/>
+          <a:p>
+            <a:pPr algn="ctr" indent="0" marL="0">
+              <a:buNone/>
+            </a:pPr>
+            <a:r>
+              <a:rPr lang="en-US" sz="3400" b="1" dirty="0">
+                <a:solidFill>
+                  <a:srgbClr val="C9A227"/>
+                </a:solidFill>
+                <a:latin typeface="Cambria" pitchFamily="34" charset="0"/>
+                <a:ea typeface="Cambria" pitchFamily="34" charset="-122"/>
+                <a:cs typeface="Cambria" pitchFamily="34" charset="-120"/>
+              </a:rPr>
+              <a:t>6.68%</a:t>
+            </a:r>
+            <a:endParaRPr lang="en-US" sz="3400" dirty="0"/>
+          </a:p>
+        </p:txBody>
+      </p:sp>
+      <p:sp>
+        <p:nvSpPr>
+          <p:cNvPr id="10" name="Text 8"/>
+          <p:cNvSpPr txBox="1"/>
+          <p:nvPr/>
+        </p:nvSpPr>
+        <p:spPr>
+          <a:xfrm>
+            <a:off x="7498080" y="4206240"/>
+            <a:ext cx="3931920" cy="457200"/>
+          </a:xfrm>
+          <a:prstGeom prst="rect">
+            <a:avLst/>
+          </a:prstGeom>
+          <a:noFill/>
+          <a:ln/>
+        </p:spPr>
+        <p:txBody>
+          <a:bodyPr wrap="square" lIns="0" tIns="0" rIns="0" bIns="0" rtlCol="0" anchor="ctr"/>
+          <a:lstStyle/>
+          <a:p>
+            <a:pPr algn="ctr" indent="0" marL="0">
+              <a:buNone/>
+            </a:pPr>
+            <a:r>
+              <a:rPr lang="en-US" sz="1100" dirty="0">
+                <a:solidFill>
+                  <a:srgbClr val="5B6B8C"/>
+                </a:solidFill>
+                <a:latin typeface="Calibri" pitchFamily="34" charset="0"/>
+                <a:ea typeface="Calibri" pitchFamily="34" charset="-122"/>
+                <a:cs typeface="Calibri" pitchFamily="34" charset="-120"/>
+              </a:rPr>
+              <a:t>Positive (delinquent) label rate</a:t>
+            </a:r>
+            <a:endParaRPr lang="en-US" sz="1100" dirty="0"/>
+          </a:p>
+        </p:txBody>
+      </p:sp>
+      <p:sp>
+        <p:nvSpPr>
+          <p:cNvPr id="11" name="Shape 9"/>
+          <p:cNvSpPr/>
+          <p:nvPr/>
+        </p:nvSpPr>
+        <p:spPr>
+          <a:xfrm>
+            <a:off x="7315200" y="4983480"/>
+            <a:ext cx="4297680" cy="1417320"/>
+          </a:xfrm>
+          <a:prstGeom prst="roundRect">
+            <a:avLst>
+              <a:gd name="adj" fmla="val 7742"/>
+            </a:avLst>
+          </a:prstGeom>
+          <a:solidFill>
+            <a:srgbClr val="F5F8FF"/>
+          </a:solidFill>
+          <a:ln/>
+          <a:effectLst>
+            <a:outerShdw sx="100000" sy="100000" kx="0" ky="0" algn="bl" rotWithShape="0" blurRad="76200" dist="25400" dir="5400000">
+              <a:srgbClr val="9AA7C7">
+                <a:alpha val="35000"/>
+              </a:srgbClr>
+            </a:outerShdw>
+          </a:effectLst>
+        </p:spPr>
+      </p:sp>
+      <p:sp>
+        <p:nvSpPr>
+          <p:cNvPr id="12" name="Text 10"/>
+          <p:cNvSpPr txBox="1"/>
+          <p:nvPr/>
+        </p:nvSpPr>
+        <p:spPr>
+          <a:xfrm>
+            <a:off x="7315200" y="5093208"/>
+            <a:ext cx="4297680" cy="685800"/>
+          </a:xfrm>
+          <a:prstGeom prst="rect">
+            <a:avLst/>
+          </a:prstGeom>
+          <a:noFill/>
+          <a:ln/>
+        </p:spPr>
+        <p:txBody>
+          <a:bodyPr wrap="square" lIns="0" tIns="0" rIns="0" bIns="0" rtlCol="0" anchor="ctr"/>
+          <a:lstStyle/>
+          <a:p>
+            <a:pPr algn="ctr" indent="0" marL="0">
+              <a:buNone/>
+            </a:pPr>
+            <a:r>
+              <a:rPr lang="en-US" sz="3400" b="1" dirty="0">
+                <a:solidFill>
+                  <a:srgbClr val="B3392C"/>
+                </a:solidFill>
+                <a:latin typeface="Cambria" pitchFamily="34" charset="0"/>
+                <a:ea typeface="Cambria" pitchFamily="34" charset="-122"/>
+                <a:cs typeface="Cambria" pitchFamily="34" charset="-120"/>
+              </a:rPr>
+              <a:t>45%</a:t>
+            </a:r>
+            <a:endParaRPr lang="en-US" sz="3400" dirty="0"/>
+          </a:p>
+        </p:txBody>
+      </p:sp>
+      <p:sp>
+        <p:nvSpPr>
+          <p:cNvPr id="13" name="Text 11"/>
+          <p:cNvSpPr txBox="1"/>
+          <p:nvPr/>
+        </p:nvSpPr>
+        <p:spPr>
+          <a:xfrm>
+            <a:off x="7498080" y="5852160"/>
+            <a:ext cx="3931920" cy="457200"/>
+          </a:xfrm>
+          <a:prstGeom prst="rect">
+            <a:avLst/>
+          </a:prstGeom>
+          <a:noFill/>
+          <a:ln/>
+        </p:spPr>
+        <p:txBody>
+          <a:bodyPr wrap="square" lIns="0" tIns="0" rIns="0" bIns="0" rtlCol="0" anchor="ctr"/>
+          <a:lstStyle/>
+          <a:p>
+            <a:pPr algn="ctr" indent="0" marL="0">
+              <a:buNone/>
+            </a:pPr>
+            <a:r>
+              <a:rPr lang="en-US" sz="1100" dirty="0">
+                <a:solidFill>
+                  <a:srgbClr val="5B6B8C"/>
+                </a:solidFill>
+                <a:latin typeface="Calibri" pitchFamily="34" charset="0"/>
+                <a:ea typeface="Calibri" pitchFamily="34" charset="-122"/>
+                <a:cs typeface="Calibri" pitchFamily="34" charset="-120"/>
+              </a:rPr>
+              <a:t>Importance share of the single strongest feature (90+ days late)</a:t>
+            </a:r>
+            <a:endParaRPr lang="en-US" sz="1100" dirty="0"/>
+          </a:p>
+        </p:txBody>
+      </p:sp>
+      <p:sp>
+        <p:nvSpPr>
+          <p:cNvPr id="14" name="Text 12"/>
+          <p:cNvSpPr txBox="1"/>
+          <p:nvPr/>
+        </p:nvSpPr>
+        <p:spPr>
+          <a:xfrm>
+            <a:off x="457200" y="6510528"/>
+            <a:ext cx="8229600" cy="274320"/>
+          </a:xfrm>
+          <a:prstGeom prst="rect">
+            <a:avLst/>
+          </a:prstGeom>
+          <a:noFill/>
+          <a:ln/>
+        </p:spPr>
+        <p:txBody>
+          <a:bodyPr wrap="square" lIns="0" tIns="0" rIns="0" bIns="0" rtlCol="0" anchor="ctr"/>
+          <a:lstStyle/>
+          <a:p>
+            <a:pPr indent="0" marL="0">
+              <a:buNone/>
+            </a:pPr>
+            <a:r>
+              <a:rPr lang="en-US" sz="900" dirty="0">
+                <a:solidFill>
+                  <a:srgbClr val="5B6B8C"/>
+                </a:solidFill>
+                <a:latin typeface="Calibri" pitchFamily="34" charset="0"/>
+                <a:ea typeface="Calibri" pitchFamily="34" charset="-122"/>
+                <a:cs typeface="Calibri" pitchFamily="34" charset="-120"/>
+              </a:rPr>
+              <a:t>AI-Driven Loan Underwriting &amp; Document Fraud Detection</a:t>
+            </a:r>
+            <a:endParaRPr lang="en-US" sz="900" dirty="0"/>
+          </a:p>
+        </p:txBody>
+      </p:sp>
+      <p:sp>
+        <p:nvSpPr>
+          <p:cNvPr id="15" name="Text 13"/>
+          <p:cNvSpPr txBox="1"/>
+          <p:nvPr/>
+        </p:nvSpPr>
+        <p:spPr>
+          <a:xfrm>
+            <a:off x="11430000" y="6510528"/>
+            <a:ext cx="365760" cy="274320"/>
+          </a:xfrm>
+          <a:prstGeom prst="rect">
+            <a:avLst/>
+          </a:prstGeom>
+          <a:noFill/>
+          <a:ln/>
+        </p:spPr>
+        <p:txBody>
+          <a:bodyPr wrap="square" lIns="0" tIns="0" rIns="0" bIns="0" rtlCol="0" anchor="ctr"/>
+          <a:lstStyle/>
+          <a:p>
+            <a:pPr algn="r" indent="0" marL="0">
+              <a:buNone/>
+            </a:pPr>
+            <a:r>
+              <a:rPr lang="en-US" sz="900" dirty="0">
+                <a:solidFill>
+                  <a:srgbClr val="5B6B8C"/>
+                </a:solidFill>
+                <a:latin typeface="Calibri" pitchFamily="34" charset="0"/>
+                <a:ea typeface="Calibri" pitchFamily="34" charset="-122"/>
+                <a:cs typeface="Calibri" pitchFamily="34" charset="-120"/>
+              </a:rPr>
+              <a:t>16</a:t>
+            </a:r>
+            <a:endParaRPr lang="en-US" sz="900" dirty="0"/>
+          </a:p>
+        </p:txBody>
+      </p:sp>
+    </p:spTree>
+  </p:cSld>
+  <p:clrMapOvr>
+    <a:masterClrMapping/>
+  </p:clrMapOvr>
+</p:sld>
+</file>
+
+<file path=ppt/slides/slide17.xml><?xml version="1.0" encoding="utf-8"?>
+<p:sld xmlns:a="http://schemas.openxmlformats.org/drawingml/2006/main" xmlns:r="http://schemas.openxmlformats.org/officeDocument/2006/relationships" xmlns:p="http://schemas.openxmlformats.org/presentationml/2006/main">
+  <p:cSld name="Slide 6">
+    <p:bg>
+      <p:bgPr>
+        <a:solidFill>
+          <a:srgbClr val="FFFFFF"/>
+        </a:solidFill>
+      </p:bgPr>
+    </p:bg>
+    <p:spTree>
+      <p:nvGrpSpPr>
+        <p:cNvPr id="1" name=""/>
+        <p:cNvGrpSpPr/>
+        <p:nvPr/>
+      </p:nvGrpSpPr>
+      <p:grpSpPr>
+        <a:xfrm>
+          <a:off x="0" y="0"/>
+          <a:ext cx="0" cy="0"/>
+          <a:chOff x="0" y="0"/>
+          <a:chExt cx="0" cy="0"/>
+        </a:xfrm>
+      </p:grpSpPr>
+      <p:sp>
+        <p:nvSpPr>
+          <p:cNvPr id="2" name="Text 0"/>
+          <p:cNvSpPr txBox="1"/>
+          <p:nvPr/>
+        </p:nvSpPr>
+        <p:spPr>
+          <a:xfrm>
+            <a:off x="2240280" y="502920"/>
+            <a:ext cx="9281160" cy="320040"/>
+          </a:xfrm>
+          <a:prstGeom prst="rect">
+            <a:avLst/>
+          </a:prstGeom>
+          <a:noFill/>
+          <a:ln/>
+        </p:spPr>
+        <p:txBody>
+          <a:bodyPr wrap="square" lIns="0" tIns="0" rIns="0" bIns="0" rtlCol="0" anchor="ctr"/>
+          <a:lstStyle/>
+          <a:p>
+            <a:pPr indent="0" marL="0">
+              <a:buNone/>
+            </a:pPr>
+            <a:r>
+              <a:rPr lang="en-US" sz="1200" b="1" spc="200" kern="0" dirty="0">
+                <a:solidFill>
+                  <a:srgbClr val="C9A227"/>
+                </a:solidFill>
+                <a:latin typeface="Calibri" pitchFamily="34" charset="0"/>
+                <a:ea typeface="Calibri" pitchFamily="34" charset="-122"/>
+                <a:cs typeface="Calibri" pitchFamily="34" charset="-120"/>
+              </a:rPr>
+              <a:t>HONEST ENGINEERING</a:t>
+            </a:r>
+            <a:endParaRPr lang="en-US" sz="1200" dirty="0"/>
+          </a:p>
+        </p:txBody>
+      </p:sp>
+      <p:sp>
+        <p:nvSpPr>
+          <p:cNvPr id="3" name="Text 1"/>
+          <p:cNvSpPr txBox="1"/>
+          <p:nvPr/>
+        </p:nvSpPr>
+        <p:spPr>
+          <a:xfrm>
+            <a:off x="2240280" y="822960"/>
+            <a:ext cx="9281160" cy="640080"/>
+          </a:xfrm>
+          <a:prstGeom prst="rect">
+            <a:avLst/>
+          </a:prstGeom>
+          <a:noFill/>
+          <a:ln/>
+        </p:spPr>
+        <p:txBody>
+          <a:bodyPr wrap="square" lIns="0" tIns="0" rIns="0" bIns="0" rtlCol="0" anchor="ctr"/>
+          <a:lstStyle/>
+          <a:p>
+            <a:pPr indent="0" marL="0">
+              <a:buNone/>
+            </a:pPr>
+            <a:r>
+              <a:rPr lang="en-US" sz="2400" b="1" dirty="0">
+                <a:solidFill>
+                  <a:srgbClr val="1E2761"/>
+                </a:solidFill>
+                <a:latin typeface="Cambria" pitchFamily="34" charset="0"/>
+                <a:ea typeface="Cambria" pitchFamily="34" charset="-122"/>
+                <a:cs typeface="Cambria" pitchFamily="34" charset="-120"/>
+              </a:rPr>
+              <a:t>Deviations From the First Review</a:t>
+            </a:r>
+            <a:endParaRPr lang="en-US" sz="2400" dirty="0"/>
+          </a:p>
+        </p:txBody>
+      </p:sp>
+      <p:sp>
+        <p:nvSpPr>
+          <p:cNvPr id="4" name="Shape 2"/>
+          <p:cNvSpPr/>
+          <p:nvPr/>
+        </p:nvSpPr>
+        <p:spPr>
+          <a:xfrm>
+            <a:off x="640080" y="548640"/>
+            <a:ext cx="1371600" cy="1371600"/>
+          </a:xfrm>
+          <a:prstGeom prst="ellipse">
+            <a:avLst/>
+          </a:prstGeom>
+          <a:solidFill>
+            <a:srgbClr val="1E2761"/>
+          </a:solidFill>
+          <a:ln/>
+        </p:spPr>
+      </p:sp>
+      <p:pic>
+        <p:nvPicPr>
+          <p:cNvPr id="5" name="Image 0" descr="preencoded.png">    </p:cNvPr>
+          <p:cNvPicPr>
+            <a:picLocks noChangeAspect="1"/>
+          </p:cNvPicPr>
+          <p:nvPr/>
+        </p:nvPicPr>
+        <p:blipFill>
+          <a:blip r:embed="rId1"/>
+          <a:stretch>
+            <a:fillRect/>
+          </a:stretch>
+        </p:blipFill>
+        <p:spPr>
+          <a:xfrm>
+            <a:off x="804672" y="713232"/>
+            <a:ext cx="1042416" cy="1042416"/>
+          </a:xfrm>
+          <a:prstGeom prst="rect">
+            <a:avLst/>
+          </a:prstGeom>
+        </p:spPr>
+      </p:pic>
+      <p:sp>
+        <p:nvSpPr>
+          <p:cNvPr id="6" name="Text 3"/>
+          <p:cNvSpPr txBox="1"/>
+          <p:nvPr/>
+        </p:nvSpPr>
+        <p:spPr>
+          <a:xfrm>
+            <a:off x="2240280" y="1691640"/>
+            <a:ext cx="9281160" cy="3017520"/>
+          </a:xfrm>
+          <a:prstGeom prst="rect">
+            <a:avLst/>
+          </a:prstGeom>
+          <a:noFill/>
+          <a:ln/>
+        </p:spPr>
+        <p:txBody>
+          <a:bodyPr wrap="square" lIns="0" tIns="0" rIns="0" bIns="0" rtlCol="0" anchor="t"/>
+          <a:lstStyle/>
+          <a:p>
+            <a:pPr marL="228600" indent="-228600">
+              <a:spcAft>
+                <a:spcPts val="1400"/>
+              </a:spcAft>
+              <a:buSzPct val="100000"/>
+              <a:buChar char="▪"/>
+            </a:pPr>
+            <a:r>
+              <a:rPr lang="en-US" sz="1500" dirty="0">
+                <a:solidFill>
+                  <a:srgbClr val="1B1B2F"/>
+                </a:solidFill>
+                <a:latin typeface="Calibri" pitchFamily="34" charset="0"/>
+                <a:ea typeface="Calibri" pitchFamily="34" charset="-122"/>
+                <a:cs typeface="Calibri" pitchFamily="34" charset="-120"/>
+              </a:rPr>
+              <a:t>Database: MySQL was proposed; SQLite is used instead - no concurrent-write need yet at single-user prototype scale</a:t>
+            </a:r>
+            <a:endParaRPr lang="en-US" sz="1500" dirty="0"/>
+          </a:p>
+          <a:p>
+            <a:pPr marL="228600" indent="-228600">
+              <a:spcAft>
+                <a:spcPts val="1400"/>
+              </a:spcAft>
+              <a:buSzPct val="100000"/>
+              <a:buChar char="▪"/>
+            </a:pPr>
+            <a:r>
+              <a:rPr lang="en-US" sz="1500" dirty="0">
+                <a:solidFill>
+                  <a:srgbClr val="1B1B2F"/>
+                </a:solidFill>
+                <a:latin typeface="Calibri" pitchFamily="34" charset="0"/>
+                <a:ea typeface="Calibri" pitchFamily="34" charset="-122"/>
+                <a:cs typeface="Calibri" pitchFamily="34" charset="-120"/>
+              </a:rPr>
+              <a:t>Fraud gating: the First Review's decision table treats ELA as auto-reject evidence; ELA stays diagnostic-only here, since it false-positives on clean scans - only metadata + ledger math auto-gate</a:t>
+            </a:r>
+            <a:endParaRPr lang="en-US" sz="1500" dirty="0"/>
+          </a:p>
+          <a:p>
+            <a:pPr marL="228600" indent="-228600">
+              <a:spcAft>
+                <a:spcPts val="1400"/>
+              </a:spcAft>
+              <a:buSzPct val="100000"/>
+              <a:buChar char="▪"/>
+            </a:pPr>
+            <a:r>
+              <a:rPr lang="en-US" sz="1500" dirty="0">
+                <a:solidFill>
+                  <a:srgbClr val="1B1B2F"/>
+                </a:solidFill>
+                <a:latin typeface="Calibri" pitchFamily="34" charset="0"/>
+                <a:ea typeface="Calibri" pitchFamily="34" charset="-122"/>
+                <a:cs typeface="Calibri" pitchFamily="34" charset="-120"/>
+              </a:rPr>
+              <a:t>Schema: forensic/financial/risk results are flat typed columns, not the JSON sub-documents in the original ER diagram - simpler to query and validate at this scale</a:t>
+            </a:r>
+            <a:endParaRPr lang="en-US" sz="1500" dirty="0"/>
+          </a:p>
+          <a:p>
+            <a:pPr marL="228600" indent="-228600">
+              <a:spcAft>
+                <a:spcPts val="1400"/>
+              </a:spcAft>
+              <a:buSzPct val="100000"/>
+              <a:buChar char="▪"/>
+            </a:pPr>
+            <a:r>
+              <a:rPr lang="en-US" sz="1500" dirty="0">
+                <a:solidFill>
+                  <a:srgbClr val="1B1B2F"/>
+                </a:solidFill>
+                <a:latin typeface="Calibri" pitchFamily="34" charset="0"/>
+                <a:ea typeface="Calibri" pitchFamily="34" charset="-122"/>
+                <a:cs typeface="Calibri" pitchFamily="34" charset="-120"/>
+              </a:rPr>
+              <a:t>Processing model: originally synchronous end-to-end; now asynchronous with a background pipeline and live polling</a:t>
+            </a:r>
+            <a:endParaRPr lang="en-US" sz="1500" dirty="0"/>
+          </a:p>
+          <a:p>
+            <a:pPr marL="228600" indent="-228600">
+              <a:spcAft>
+                <a:spcPts val="1400"/>
+              </a:spcAft>
+              <a:buSzPct val="100000"/>
+              <a:buChar char="▪"/>
+            </a:pPr>
+            <a:r>
+              <a:rPr lang="en-US" sz="1500" dirty="0">
+                <a:solidFill>
+                  <a:srgbClr val="1B1B2F"/>
+                </a:solidFill>
+                <a:latin typeface="Calibri" pitchFamily="34" charset="0"/>
+                <a:ea typeface="Calibri" pitchFamily="34" charset="-122"/>
+                <a:cs typeface="Calibri" pitchFamily="34" charset="-120"/>
+              </a:rPr>
+              <a:t>Every deviation above is deliberate and documented - not scope creep</a:t>
+            </a:r>
+            <a:endParaRPr lang="en-US" sz="1500" dirty="0"/>
+          </a:p>
+        </p:txBody>
+      </p:sp>
+      <p:sp>
+        <p:nvSpPr>
+          <p:cNvPr id="7" name="Shape 4"/>
+          <p:cNvSpPr/>
+          <p:nvPr/>
+        </p:nvSpPr>
+        <p:spPr>
+          <a:xfrm>
+            <a:off x="640080" y="4892040"/>
+            <a:ext cx="10908792" cy="1143000"/>
+          </a:xfrm>
+          <a:prstGeom prst="roundRect">
+            <a:avLst>
+              <a:gd name="adj" fmla="val 8000"/>
+            </a:avLst>
+          </a:prstGeom>
+          <a:solidFill>
+            <a:srgbClr val="F5F8FF"/>
+          </a:solidFill>
+          <a:ln/>
+        </p:spPr>
+      </p:sp>
+      <p:sp>
+        <p:nvSpPr>
+          <p:cNvPr id="8" name="Text 5"/>
+          <p:cNvSpPr txBox="1"/>
+          <p:nvPr/>
+        </p:nvSpPr>
+        <p:spPr>
+          <a:xfrm>
+            <a:off x="914400" y="5029200"/>
+            <a:ext cx="10332720" cy="274320"/>
+          </a:xfrm>
+          <a:prstGeom prst="rect">
+            <a:avLst/>
+          </a:prstGeom>
+          <a:noFill/>
+          <a:ln/>
+        </p:spPr>
+        <p:txBody>
+          <a:bodyPr wrap="square" lIns="0" tIns="0" rIns="0" bIns="0" rtlCol="0" anchor="ctr"/>
+          <a:lstStyle/>
+          <a:p>
+            <a:pPr indent="0" marL="0">
+              <a:buNone/>
+            </a:pPr>
+            <a:r>
+              <a:rPr lang="en-US" sz="1100" b="1" spc="150" kern="0" dirty="0">
+                <a:solidFill>
+                  <a:srgbClr val="C9A227"/>
+                </a:solidFill>
+                <a:latin typeface="Calibri" pitchFamily="34" charset="0"/>
+                <a:ea typeface="Calibri" pitchFamily="34" charset="-122"/>
+                <a:cs typeface="Calibri" pitchFamily="34" charset="-120"/>
+              </a:rPr>
+              <a:t>WHY IT MATTERS</a:t>
+            </a:r>
+            <a:endParaRPr lang="en-US" sz="1100" dirty="0"/>
+          </a:p>
+        </p:txBody>
+      </p:sp>
+      <p:sp>
+        <p:nvSpPr>
+          <p:cNvPr id="9" name="Text 6"/>
+          <p:cNvSpPr txBox="1"/>
+          <p:nvPr/>
+        </p:nvSpPr>
+        <p:spPr>
+          <a:xfrm>
+            <a:off x="914400" y="5321808"/>
+            <a:ext cx="10332720" cy="640080"/>
+          </a:xfrm>
+          <a:prstGeom prst="rect">
+            <a:avLst/>
+          </a:prstGeom>
+          <a:noFill/>
+          <a:ln/>
+        </p:spPr>
+        <p:txBody>
+          <a:bodyPr wrap="square" lIns="0" tIns="0" rIns="0" bIns="0" rtlCol="0" anchor="t"/>
+          <a:lstStyle/>
+          <a:p>
+            <a:pPr indent="0" marL="0">
+              <a:buNone/>
+            </a:pPr>
+            <a:r>
+              <a:rPr lang="en-US" sz="1350" i="1" dirty="0">
+                <a:solidFill>
+                  <a:srgbClr val="1E2761"/>
+                </a:solidFill>
+                <a:latin typeface="Calibri" pitchFamily="34" charset="0"/>
+                <a:ea typeface="Calibri" pitchFamily="34" charset="-122"/>
+                <a:cs typeface="Calibri" pitchFamily="34" charset="-120"/>
+              </a:rPr>
+              <a:t>A review panel that reads both reports closely will notice these differences - naming them up front, with the reasoning, is what makes them engineering decisions rather than inconsistencies.</a:t>
+            </a:r>
+            <a:endParaRPr lang="en-US" sz="1350" dirty="0"/>
+          </a:p>
+        </p:txBody>
+      </p:sp>
+      <p:sp>
+        <p:nvSpPr>
+          <p:cNvPr id="10" name="Text 7"/>
+          <p:cNvSpPr txBox="1"/>
+          <p:nvPr/>
+        </p:nvSpPr>
+        <p:spPr>
+          <a:xfrm>
+            <a:off x="457200" y="6510528"/>
+            <a:ext cx="8229600" cy="274320"/>
+          </a:xfrm>
+          <a:prstGeom prst="rect">
+            <a:avLst/>
+          </a:prstGeom>
+          <a:noFill/>
+          <a:ln/>
+        </p:spPr>
+        <p:txBody>
+          <a:bodyPr wrap="square" lIns="0" tIns="0" rIns="0" bIns="0" rtlCol="0" anchor="ctr"/>
+          <a:lstStyle/>
+          <a:p>
+            <a:pPr indent="0" marL="0">
+              <a:buNone/>
+            </a:pPr>
+            <a:r>
+              <a:rPr lang="en-US" sz="900" dirty="0">
+                <a:solidFill>
+                  <a:srgbClr val="5B6B8C"/>
+                </a:solidFill>
+                <a:latin typeface="Calibri" pitchFamily="34" charset="0"/>
+                <a:ea typeface="Calibri" pitchFamily="34" charset="-122"/>
+                <a:cs typeface="Calibri" pitchFamily="34" charset="-120"/>
+              </a:rPr>
+              <a:t>AI-Driven Loan Underwriting &amp; Document Fraud Detection</a:t>
+            </a:r>
+            <a:endParaRPr lang="en-US" sz="900" dirty="0"/>
+          </a:p>
+        </p:txBody>
+      </p:sp>
+      <p:sp>
+        <p:nvSpPr>
+          <p:cNvPr id="11" name="Text 8"/>
+          <p:cNvSpPr txBox="1"/>
+          <p:nvPr/>
+        </p:nvSpPr>
+        <p:spPr>
+          <a:xfrm>
+            <a:off x="11430000" y="6510528"/>
+            <a:ext cx="365760" cy="274320"/>
+          </a:xfrm>
+          <a:prstGeom prst="rect">
+            <a:avLst/>
+          </a:prstGeom>
+          <a:noFill/>
+          <a:ln/>
+        </p:spPr>
+        <p:txBody>
+          <a:bodyPr wrap="square" lIns="0" tIns="0" rIns="0" bIns="0" rtlCol="0" anchor="ctr"/>
+          <a:lstStyle/>
+          <a:p>
+            <a:pPr algn="r" indent="0" marL="0">
+              <a:buNone/>
+            </a:pPr>
+            <a:r>
+              <a:rPr lang="en-US" sz="900" dirty="0">
+                <a:solidFill>
+                  <a:srgbClr val="5B6B8C"/>
+                </a:solidFill>
+                <a:latin typeface="Calibri" pitchFamily="34" charset="0"/>
+                <a:ea typeface="Calibri" pitchFamily="34" charset="-122"/>
+                <a:cs typeface="Calibri" pitchFamily="34" charset="-120"/>
+              </a:rPr>
+              <a:t>17</a:t>
+            </a:r>
+            <a:endParaRPr lang="en-US" sz="900" dirty="0"/>
+          </a:p>
+        </p:txBody>
+      </p:sp>
+    </p:spTree>
+  </p:cSld>
+  <p:clrMapOvr>
+    <a:masterClrMapping/>
+  </p:clrMapOvr>
+</p:sld>
+</file>
+
+<file path=ppt/slides/slide18.xml><?xml version="1.0" encoding="utf-8"?>
+<p:sld xmlns:a="http://schemas.openxmlformats.org/drawingml/2006/main" xmlns:r="http://schemas.openxmlformats.org/officeDocument/2006/relationships" xmlns:p="http://schemas.openxmlformats.org/presentationml/2006/main">
   <p:cSld name="Slide 15">
     <p:bg>
       <p:bgPr>
@@ -7098,7 +8655,7 @@
                 <a:ea typeface="Calibri" pitchFamily="34" charset="-122"/>
                 <a:cs typeface="Calibri" pitchFamily="34" charset="-120"/>
               </a:rPr>
-              <a:t>15</a:t>
+              <a:t>18</a:t>
             </a:r>
             <a:endParaRPr lang="en-US" sz="900" dirty="0"/>
           </a:p>
